--- a/dist/초2/정보·AI/정보와표현/초2_정보·AI_정보와표현_01_순서를바꾸면.pptx
+++ b/dist/초2/정보·AI/정보와표현/초2_정보·AI_정보와표현_01_순서를바꾸면.pptx
@@ -119,45 +119,45 @@
   <p:extLst>
     <p:ext uri="{521415D9-36F7-43E2-AB2F-B90AF26B5E84}">
       <p14:sectionLst xmlns:p14="http://schemas.microsoft.com/office/powerpoint/2010/main">
-        <p14:section name="도입" id="{07c994c1-00dc-ee5f-b7ce-26a35a11cbea}">
+        <p14:section name="도입" id="{faab5f5a-688c-88d0-2cda-965f24414270}">
           <p14:sldIdLst>
             <p14:sldId id="256"/>
             <p14:sldId id="257"/>
           </p14:sldIdLst>
         </p14:section>
-        <p14:section name="개념" id="{e02c4d00-f483-737f-9498-e72dcadb3ae5}">
+        <p14:section name="개념" id="{b2415a5c-eac0-440e-c6be-61ca7ec43360}">
           <p14:sldIdLst>
             <p14:sldId id="258"/>
             <p14:sldId id="260"/>
             <p14:sldId id="261"/>
           </p14:sldIdLst>
         </p14:section>
-        <p14:section name="연습" id="{26363ea5-d581-7740-06b9-82f6f1667804}">
+        <p14:section name="연습" id="{13318852-040e-cba4-0290-4be855eb2884}">
           <p14:sldIdLst>
             <p14:sldId id="259"/>
             <p14:sldId id="262"/>
             <p14:sldId id="263"/>
           </p14:sldIdLst>
         </p14:section>
-        <p14:section name="개념" id="{3554e75c-7d05-5e2d-c0bf-e35ff4aeee5d}">
+        <p14:section name="개념" id="{f380e180-b668-3c84-1443-7cc1ff933b3b}">
           <p14:sldIdLst/>
         </p14:section>
-        <p14:section name="연습" id="{38e040b4-ce2f-1e7e-b4c7-97098d5fe766}">
+        <p14:section name="연습" id="{f4131da1-b5a3-3715-79ef-b71434185f3c}">
           <p14:sldIdLst/>
         </p14:section>
-        <p14:section name="확인" id="{3d36ba02-cb4f-6aeb-0e7f-9642d19da674}">
+        <p14:section name="확인" id="{0a62ff8d-24a1-b0a9-d8a6-c843cc1cbac9}">
           <p14:sldIdLst>
             <p14:sldId id="264"/>
             <p14:sldId id="265"/>
             <p14:sldId id="266"/>
           </p14:sldIdLst>
         </p14:section>
-        <p14:section name="정리" id="{bf9ab454-19c8-ef22-4a56-c8c6e2f23cad}">
+        <p14:section name="정리" id="{dc5f7d8f-3924-b6a5-05eb-d47fe8a1bcd8}">
           <p14:sldIdLst>
             <p14:sldId id="267"/>
           </p14:sldIdLst>
         </p14:section>
-        <p14:section name="보충" id="{d49d11fa-1bb1-5bb7-e275-ae0d685beb4f}">
+        <p14:section name="보충" id="{3b2d0cf5-e224-944a-88ff-fc3a8ac2e46e}">
           <p14:sldIdLst>
             <p14:sldId id="268"/>
           </p14:sldIdLst>
@@ -970,7 +970,7 @@
 막히면
 - 쪽지 세 장에 ‘처음, 그다음, 마지막’을 써서 바닥에 놓고, 아이가 그 위를 차례로 밟으며 말하게 합니다.
 주의
-- 이 차시는 계획상 앞 차시가 없습니다. 보충으로도 어렵다면 초1 ‘나의 하루’, ‘디지털 기기와 순서’처럼 하루의 차례를 말하는 차시를 먼저 합니다.</a:t>
+- 보충으로도 어렵다면 초1 ‘나의 하루’, ‘디지털 기기와 순서’처럼 하루의 차례를 말하는 차시를 먼저 합니다.</a:t>
             </a:r>
             <a:endParaRPr lang="en-US" dirty="0"/>
           </a:p>
@@ -1070,7 +1070,7 @@
 - ① 치약 짜기 → 이 닦기 → 입 헹구기
 막히면
 - 차례 말(처음·그다음·마지막)을 쓰지 못하거나 ①의 차례가 뒤죽박죽이면 S13(보충)을 먼저 합니다.
-- 이 차시는 계획상 앞 차시가 없습니다. 초1 ‘디지털 기기와 순서’, ‘나의 하루’와 이어지는 내용입니다.</a:t>
+- 초1 ‘디지털 기기와 순서’, ‘나의 하루’와 이어지는 내용입니다.</a:t>
             </a:r>
             <a:endParaRPr lang="en-US" dirty="0"/>
           </a:p>
